--- a/@Materi Kuliah/Materi_Desain_Eksperimen/Presentasi_Desain_Eksperimen_Profesional_dari_HTML.pptx
+++ b/@Materi Kuliah/Materi_Desain_Eksperimen/Presentasi_Desain_Eksperimen_Profesional_dari_HTML.pptx
@@ -2,131 +2,36 @@
 <file path=ppt/presentation.xml><?xml version="1.0" encoding="utf-8"?>
 <p:presentation xmlns:p="http://schemas.openxmlformats.org/presentationml/2006/main">
   <p:sldMasterIdLst>
-    <p:sldMasterId xmlns:r="http://schemas.openxmlformats.org/officeDocument/2006/relationships" id="2147483648" r:id="R45e19956042a4893"/>
+    <p:sldMasterId xmlns:r="http://schemas.openxmlformats.org/officeDocument/2006/relationships" id="2147483648" r:id="R3ac289927c9c4749"/>
   </p:sldMasterIdLst>
   <p:notesMasterIdLst>
-    <p:notesMasterId xmlns:r="http://schemas.openxmlformats.org/officeDocument/2006/relationships" r:id="Rec69cbf33e164fe1"/>
+    <p:notesMasterId xmlns:r="http://schemas.openxmlformats.org/officeDocument/2006/relationships" r:id="R7ac9f8e6fc8f4062"/>
   </p:notesMasterIdLst>
   <p:sldIdLst>
-    <p:sldId xmlns:r="http://schemas.openxmlformats.org/officeDocument/2006/relationships" id="256" r:id="Rf771d17ff7284603"/>
-    <p:sldId xmlns:r="http://schemas.openxmlformats.org/officeDocument/2006/relationships" id="257" r:id="R5a77d0d2cd5b47ca"/>
-    <p:sldId xmlns:r="http://schemas.openxmlformats.org/officeDocument/2006/relationships" id="258" r:id="Rb147925e28cb4bbc"/>
-    <p:sldId xmlns:r="http://schemas.openxmlformats.org/officeDocument/2006/relationships" id="259" r:id="R053b0cc004e348a2"/>
-    <p:sldId xmlns:r="http://schemas.openxmlformats.org/officeDocument/2006/relationships" id="260" r:id="Rcb431679a9c84d5f"/>
-    <p:sldId xmlns:r="http://schemas.openxmlformats.org/officeDocument/2006/relationships" id="261" r:id="R90609acb3193405b"/>
-    <p:sldId xmlns:r="http://schemas.openxmlformats.org/officeDocument/2006/relationships" id="262" r:id="R02a7cfcdd42f4219"/>
-    <p:sldId xmlns:r="http://schemas.openxmlformats.org/officeDocument/2006/relationships" id="263" r:id="Rd9ff2b9ea3164e88"/>
-    <p:sldId xmlns:r="http://schemas.openxmlformats.org/officeDocument/2006/relationships" id="264" r:id="Rf7d556bc1fb04722"/>
-    <p:sldId xmlns:r="http://schemas.openxmlformats.org/officeDocument/2006/relationships" id="265" r:id="R79dba300fc734621"/>
-    <p:sldId xmlns:r="http://schemas.openxmlformats.org/officeDocument/2006/relationships" id="266" r:id="Re0a552df31bd4304"/>
-    <p:sldId xmlns:r="http://schemas.openxmlformats.org/officeDocument/2006/relationships" id="267" r:id="R50e793b008514af8"/>
-    <p:sldId xmlns:r="http://schemas.openxmlformats.org/officeDocument/2006/relationships" id="268" r:id="R4bec506c969b459f"/>
-    <p:sldId xmlns:r="http://schemas.openxmlformats.org/officeDocument/2006/relationships" id="269" r:id="Ra545e1cfb85042b4"/>
-    <p:sldId xmlns:r="http://schemas.openxmlformats.org/officeDocument/2006/relationships" id="270" r:id="R1b69f71f8e754e2e"/>
-    <p:sldId xmlns:r="http://schemas.openxmlformats.org/officeDocument/2006/relationships" id="271" r:id="R9f48e0ed287f4b5f"/>
-    <p:sldId xmlns:r="http://schemas.openxmlformats.org/officeDocument/2006/relationships" id="272" r:id="Rcd63eb37775c4ee4"/>
-    <p:sldId xmlns:r="http://schemas.openxmlformats.org/officeDocument/2006/relationships" id="273" r:id="R53600ba6e2714e3d"/>
-    <p:sldId xmlns:r="http://schemas.openxmlformats.org/officeDocument/2006/relationships" id="274" r:id="R1fe8b24f38514281"/>
-    <p:sldId xmlns:r="http://schemas.openxmlformats.org/officeDocument/2006/relationships" id="275" r:id="R18e0fc0504d0456c"/>
-    <p:sldId xmlns:r="http://schemas.openxmlformats.org/officeDocument/2006/relationships" id="276" r:id="Rc99891c8ed774e35"/>
+    <p:sldId xmlns:r="http://schemas.openxmlformats.org/officeDocument/2006/relationships" id="256" r:id="Ra1533804f3084885"/>
+    <p:sldId xmlns:r="http://schemas.openxmlformats.org/officeDocument/2006/relationships" id="257" r:id="Rfa794087cd994248"/>
+    <p:sldId xmlns:r="http://schemas.openxmlformats.org/officeDocument/2006/relationships" id="258" r:id="R5027472756e44d93"/>
+    <p:sldId xmlns:r="http://schemas.openxmlformats.org/officeDocument/2006/relationships" id="259" r:id="R8603b73517f84919"/>
+    <p:sldId xmlns:r="http://schemas.openxmlformats.org/officeDocument/2006/relationships" id="260" r:id="R245275d8362c499e"/>
+    <p:sldId xmlns:r="http://schemas.openxmlformats.org/officeDocument/2006/relationships" id="261" r:id="R02c8cfd2e2e347c4"/>
+    <p:sldId xmlns:r="http://schemas.openxmlformats.org/officeDocument/2006/relationships" id="262" r:id="Rd36281ed10db4a11"/>
+    <p:sldId xmlns:r="http://schemas.openxmlformats.org/officeDocument/2006/relationships" id="263" r:id="Re4df9eb7fbbb47a6"/>
+    <p:sldId xmlns:r="http://schemas.openxmlformats.org/officeDocument/2006/relationships" id="264" r:id="R56e5218a5f854b66"/>
+    <p:sldId xmlns:r="http://schemas.openxmlformats.org/officeDocument/2006/relationships" id="265" r:id="R459754926af448be"/>
+    <p:sldId xmlns:r="http://schemas.openxmlformats.org/officeDocument/2006/relationships" id="266" r:id="R11aa0029fd074f6e"/>
+    <p:sldId xmlns:r="http://schemas.openxmlformats.org/officeDocument/2006/relationships" id="267" r:id="R6d46545301864bf5"/>
+    <p:sldId xmlns:r="http://schemas.openxmlformats.org/officeDocument/2006/relationships" id="268" r:id="R216820a5185745ac"/>
+    <p:sldId xmlns:r="http://schemas.openxmlformats.org/officeDocument/2006/relationships" id="269" r:id="R305e432656ea4ab8"/>
+    <p:sldId xmlns:r="http://schemas.openxmlformats.org/officeDocument/2006/relationships" id="270" r:id="R8294022865d64bfa"/>
+    <p:sldId xmlns:r="http://schemas.openxmlformats.org/officeDocument/2006/relationships" id="271" r:id="Rfc9f6b46bb5f460f"/>
+    <p:sldId xmlns:r="http://schemas.openxmlformats.org/officeDocument/2006/relationships" id="272" r:id="R7f5981edd9394a94"/>
+    <p:sldId xmlns:r="http://schemas.openxmlformats.org/officeDocument/2006/relationships" id="273" r:id="R26dde0a1baf54867"/>
+    <p:sldId xmlns:r="http://schemas.openxmlformats.org/officeDocument/2006/relationships" id="274" r:id="R3cc6a03ff4624455"/>
+    <p:sldId xmlns:r="http://schemas.openxmlformats.org/officeDocument/2006/relationships" id="275" r:id="Raadc10286195408a"/>
+    <p:sldId xmlns:r="http://schemas.openxmlformats.org/officeDocument/2006/relationships" id="276" r:id="R8787e0277f604eda"/>
   </p:sldIdLst>
   <p:sldSz cx="12192000" cy="6858000"/>
   <p:notesSz cx="6858000" cy="9144000"/>
-  <p:defaultTextStyle>
-    <a:defPPr xmlns:a="http://schemas.openxmlformats.org/drawingml/2006/main">
-      <a:defRPr lang="en-US"/>
-    </a:defPPr>
-    <a:lvl1pPr xmlns:a="http://schemas.openxmlformats.org/drawingml/2006/main" marL="0" indent="0" algn="l" defTabSz="914400">
-      <a:defRPr sz="1800" kern="1200">
-        <a:solidFill>
-          <a:schemeClr val="tx1"/>
-        </a:solidFill>
-        <a:latin typeface="+mn-lt"/>
-        <a:ea typeface="+mn-ea"/>
-        <a:cs typeface="+mn-cs"/>
-      </a:defRPr>
-    </a:lvl1pPr>
-    <a:lvl2pPr xmlns:a="http://schemas.openxmlformats.org/drawingml/2006/main" marL="457200" indent="0" algn="l" defTabSz="914400">
-      <a:defRPr sz="1800" kern="1200">
-        <a:solidFill>
-          <a:schemeClr val="tx1"/>
-        </a:solidFill>
-        <a:latin typeface="+mn-lt"/>
-        <a:ea typeface="+mn-ea"/>
-        <a:cs typeface="+mn-cs"/>
-      </a:defRPr>
-    </a:lvl2pPr>
-    <a:lvl3pPr xmlns:a="http://schemas.openxmlformats.org/drawingml/2006/main" marL="914400" indent="0" algn="l" defTabSz="914400">
-      <a:defRPr sz="1800" kern="1200">
-        <a:solidFill>
-          <a:schemeClr val="tx1"/>
-        </a:solidFill>
-        <a:latin typeface="+mn-lt"/>
-        <a:ea typeface="+mn-ea"/>
-        <a:cs typeface="+mn-cs"/>
-      </a:defRPr>
-    </a:lvl3pPr>
-    <a:lvl4pPr xmlns:a="http://schemas.openxmlformats.org/drawingml/2006/main" marL="1371600" indent="0" algn="l" defTabSz="914400">
-      <a:defRPr sz="1800" kern="1200">
-        <a:solidFill>
-          <a:schemeClr val="tx1"/>
-        </a:solidFill>
-        <a:latin typeface="+mn-lt"/>
-        <a:ea typeface="+mn-ea"/>
-        <a:cs typeface="+mn-cs"/>
-      </a:defRPr>
-    </a:lvl4pPr>
-    <a:lvl5pPr xmlns:a="http://schemas.openxmlformats.org/drawingml/2006/main" marL="1828800" indent="0" algn="l" defTabSz="914400">
-      <a:defRPr sz="1800" kern="1200">
-        <a:solidFill>
-          <a:schemeClr val="tx1"/>
-        </a:solidFill>
-        <a:latin typeface="+mn-lt"/>
-        <a:ea typeface="+mn-ea"/>
-        <a:cs typeface="+mn-cs"/>
-      </a:defRPr>
-    </a:lvl5pPr>
-    <a:lvl6pPr xmlns:a="http://schemas.openxmlformats.org/drawingml/2006/main" marL="2286000" indent="0" algn="l" defTabSz="914400">
-      <a:defRPr sz="1800" kern="1200">
-        <a:solidFill>
-          <a:schemeClr val="tx1"/>
-        </a:solidFill>
-        <a:latin typeface="+mn-lt"/>
-        <a:ea typeface="+mn-ea"/>
-        <a:cs typeface="+mn-cs"/>
-      </a:defRPr>
-    </a:lvl6pPr>
-    <a:lvl7pPr xmlns:a="http://schemas.openxmlformats.org/drawingml/2006/main" marL="2743200" indent="0" algn="l" defTabSz="914400">
-      <a:defRPr sz="1800" kern="1200">
-        <a:solidFill>
-          <a:schemeClr val="tx1"/>
-        </a:solidFill>
-        <a:latin typeface="+mn-lt"/>
-        <a:ea typeface="+mn-ea"/>
-        <a:cs typeface="+mn-cs"/>
-      </a:defRPr>
-    </a:lvl7pPr>
-    <a:lvl8pPr xmlns:a="http://schemas.openxmlformats.org/drawingml/2006/main" marL="3200400" indent="0" algn="l" defTabSz="914400">
-      <a:defRPr sz="1800" kern="1200">
-        <a:solidFill>
-          <a:schemeClr val="tx1"/>
-        </a:solidFill>
-        <a:latin typeface="+mn-lt"/>
-        <a:ea typeface="+mn-ea"/>
-        <a:cs typeface="+mn-cs"/>
-      </a:defRPr>
-    </a:lvl8pPr>
-    <a:lvl9pPr xmlns:a="http://schemas.openxmlformats.org/drawingml/2006/main" marL="3657600" indent="0" algn="l" defTabSz="914400">
-      <a:defRPr sz="1800" kern="1200">
-        <a:solidFill>
-          <a:schemeClr val="tx1"/>
-        </a:solidFill>
-        <a:latin typeface="+mn-lt"/>
-        <a:ea typeface="+mn-ea"/>
-        <a:cs typeface="+mn-cs"/>
-      </a:defRPr>
-    </a:lvl9pPr>
-  </p:defaultTextStyle>
 </p:presentation>
 </file>
 
@@ -1453,7 +1358,26 @@
         <p:txBody>
           <a:bodyPr xmlns:a="http://schemas.openxmlformats.org/drawingml/2006/main"/>
           <a:lstStyle xmlns:a="http://schemas.openxmlformats.org/drawingml/2006/main"/>
-          <a:p xmlns:a="http://schemas.openxmlformats.org/drawingml/2006/main"/>
+          <a:p xmlns:a="http://schemas.openxmlformats.org/drawingml/2006/main">
+            <a:r>
+              <a:t>[Sources]</a:t>
+            </a:r>
+          </a:p>
+          <a:p xmlns:a="http://schemas.openxmlformats.org/drawingml/2006/main">
+            <a:r>
+              <a:t>- RPS mata kuliah Revisi AI 2026, Program Studi S2 Statistika Terapan FMIPA Universitas Padjadjaran.</a:t>
+            </a:r>
+          </a:p>
+          <a:p xmlns:a="http://schemas.openxmlformats.org/drawingml/2006/main">
+            <a:r>
+              <a:t>[/Sources]</a:t>
+            </a:r>
+          </a:p>
+          <a:p xmlns:a="http://schemas.openxmlformats.org/drawingml/2006/main">
+            <a:r>
+              <a:t>Penutup: CPL tetap. AI adalah akselerator ketercapaian CPMK/Sub-CPMK, bukan pengganti penalaran statistika. Tekankan kewajiban prompt log ringkas, sumber, kode/notebook reproducible, validasi, dan audit trail.</a:t>
+            </a:r>
+          </a:p>
         </p:txBody>
       </p:sp>
       <p:sp>
@@ -2010,8 +1934,8 @@
   </p:cSld>
   <p:clrMap bg1="lt1" tx1="dk1" bg2="lt2" tx2="dk2" accent1="accent1" accent2="accent2" accent3="accent3" accent4="accent4" accent5="accent5" accent6="accent6" hlink="hlink" folHlink="folHlink"/>
   <p:sldLayoutIdLst>
-    <p:sldLayoutId xmlns:r="http://schemas.openxmlformats.org/officeDocument/2006/relationships" id="2147483649" r:id="Re2ad2dd22f0e4043"/>
-    <p:sldLayoutId xmlns:r="http://schemas.openxmlformats.org/officeDocument/2006/relationships" id="2147483650" r:id="Rfcc087d824b048b6"/>
+    <p:sldLayoutId xmlns:r="http://schemas.openxmlformats.org/officeDocument/2006/relationships" id="2147483649" r:id="R4967efd1672048b7"/>
+    <p:sldLayoutId xmlns:r="http://schemas.openxmlformats.org/officeDocument/2006/relationships" id="2147483650" r:id="Re31e706afa364952"/>
   </p:sldLayoutIdLst>
   <p:hf sldNum="0" hdr="0" ftr="0" dt="0"/>
   <p:txStyles>
@@ -2577,7 +2501,7 @@
           <p:nvPr/>
         </p:nvPicPr>
         <p:blipFill>
-          <a:blip xmlns:r="http://schemas.openxmlformats.org/officeDocument/2006/relationships" xmlns:a="http://schemas.openxmlformats.org/drawingml/2006/main" r:embed="Rd5b989ff80a844e0"/>
+          <a:blip xmlns:r="http://schemas.openxmlformats.org/officeDocument/2006/relationships" xmlns:a="http://schemas.openxmlformats.org/drawingml/2006/main" r:embed="R07946b72a2a64cb3"/>
           <a:stretch xmlns:a="http://schemas.openxmlformats.org/drawingml/2006/main">
             <a:fillRect l="0" t="0" r="0" b="0"/>
           </a:stretch>
@@ -2723,7 +2647,7 @@
           <p:nvPr/>
         </p:nvPicPr>
         <p:blipFill>
-          <a:blip xmlns:r="http://schemas.openxmlformats.org/officeDocument/2006/relationships" xmlns:a="http://schemas.openxmlformats.org/drawingml/2006/main" r:embed="R3669d744d6f04f0a"/>
+          <a:blip xmlns:r="http://schemas.openxmlformats.org/officeDocument/2006/relationships" xmlns:a="http://schemas.openxmlformats.org/drawingml/2006/main" r:embed="Rf7296cd1449043ed"/>
           <a:stretch xmlns:a="http://schemas.openxmlformats.org/drawingml/2006/main">
             <a:fillRect l="0" t="0" r="0" b="0"/>
           </a:stretch>
@@ -3329,7 +3253,7 @@
           <p:nvPr/>
         </p:nvPicPr>
         <p:blipFill>
-          <a:blip xmlns:r="http://schemas.openxmlformats.org/officeDocument/2006/relationships" xmlns:a="http://schemas.openxmlformats.org/drawingml/2006/main" r:embed="Rec92a0d6fd9144c6"/>
+          <a:blip xmlns:r="http://schemas.openxmlformats.org/officeDocument/2006/relationships" xmlns:a="http://schemas.openxmlformats.org/drawingml/2006/main" r:embed="Re1a9db31e22c4986"/>
           <a:stretch xmlns:a="http://schemas.openxmlformats.org/drawingml/2006/main">
             <a:fillRect l="0" t="0" r="0" b="0"/>
           </a:stretch>
@@ -5479,7 +5403,7 @@
           <p:nvPr/>
         </p:nvPicPr>
         <p:blipFill>
-          <a:blip xmlns:r="http://schemas.openxmlformats.org/officeDocument/2006/relationships" xmlns:a="http://schemas.openxmlformats.org/drawingml/2006/main" r:embed="R5d73e722b3474757"/>
+          <a:blip xmlns:r="http://schemas.openxmlformats.org/officeDocument/2006/relationships" xmlns:a="http://schemas.openxmlformats.org/drawingml/2006/main" r:embed="R4cefb4735c334902"/>
           <a:stretch xmlns:a="http://schemas.openxmlformats.org/drawingml/2006/main">
             <a:fillRect l="0" t="0" r="0" b="0"/>
           </a:stretch>
@@ -5758,7 +5682,7 @@
           <p:nvPr/>
         </p:nvPicPr>
         <p:blipFill>
-          <a:blip xmlns:r="http://schemas.openxmlformats.org/officeDocument/2006/relationships" xmlns:a="http://schemas.openxmlformats.org/drawingml/2006/main" r:embed="R21b7817e8bb24708"/>
+          <a:blip xmlns:r="http://schemas.openxmlformats.org/officeDocument/2006/relationships" xmlns:a="http://schemas.openxmlformats.org/drawingml/2006/main" r:embed="Rfbec73918af34428"/>
           <a:stretch xmlns:a="http://schemas.openxmlformats.org/drawingml/2006/main">
             <a:fillRect l="0" t="0" r="0" b="0"/>
           </a:stretch>
@@ -7292,7 +7216,7 @@
           <p:nvPr/>
         </p:nvPicPr>
         <p:blipFill>
-          <a:blip xmlns:r="http://schemas.openxmlformats.org/officeDocument/2006/relationships" xmlns:a="http://schemas.openxmlformats.org/drawingml/2006/main" r:embed="Rf4646af4b1804fd5"/>
+          <a:blip xmlns:r="http://schemas.openxmlformats.org/officeDocument/2006/relationships" xmlns:a="http://schemas.openxmlformats.org/drawingml/2006/main" r:embed="R0871d15233b944a4"/>
           <a:stretch xmlns:a="http://schemas.openxmlformats.org/drawingml/2006/main">
             <a:fillRect l="0" t="0" r="0" b="0"/>
           </a:stretch>
@@ -8461,7 +8385,7 @@
           <p:nvPr/>
         </p:nvPicPr>
         <p:blipFill>
-          <a:blip xmlns:r="http://schemas.openxmlformats.org/officeDocument/2006/relationships" xmlns:a="http://schemas.openxmlformats.org/drawingml/2006/main" r:embed="Rc04897643d7343c9"/>
+          <a:blip xmlns:r="http://schemas.openxmlformats.org/officeDocument/2006/relationships" xmlns:a="http://schemas.openxmlformats.org/drawingml/2006/main" r:embed="Rc1eeaec49a0545e0"/>
           <a:stretch xmlns:a="http://schemas.openxmlformats.org/drawingml/2006/main">
             <a:fillRect l="0" t="0" r="0" b="0"/>
           </a:stretch>
@@ -9688,7 +9612,7 @@
           <p:nvPr/>
         </p:nvPicPr>
         <p:blipFill>
-          <a:blip xmlns:r="http://schemas.openxmlformats.org/officeDocument/2006/relationships" xmlns:a="http://schemas.openxmlformats.org/drawingml/2006/main" r:embed="Rfd60b21f39734dde"/>
+          <a:blip xmlns:r="http://schemas.openxmlformats.org/officeDocument/2006/relationships" xmlns:a="http://schemas.openxmlformats.org/drawingml/2006/main" r:embed="R44e13c2869cb4d2e"/>
           <a:stretch xmlns:a="http://schemas.openxmlformats.org/drawingml/2006/main">
             <a:fillRect l="0" t="0" r="0" b="0"/>
           </a:stretch>
@@ -10893,7 +10817,7 @@
           <p:nvPr/>
         </p:nvPicPr>
         <p:blipFill>
-          <a:blip xmlns:r="http://schemas.openxmlformats.org/officeDocument/2006/relationships" xmlns:a="http://schemas.openxmlformats.org/drawingml/2006/main" r:embed="Rb2d9b314d0d1446a"/>
+          <a:blip xmlns:r="http://schemas.openxmlformats.org/officeDocument/2006/relationships" xmlns:a="http://schemas.openxmlformats.org/drawingml/2006/main" r:embed="Raa1d5a8d73404221"/>
           <a:stretch xmlns:a="http://schemas.openxmlformats.org/drawingml/2006/main">
             <a:fillRect l="0" t="0" r="0" b="0"/>
           </a:stretch>
@@ -11172,7 +11096,7 @@
           <p:nvPr/>
         </p:nvPicPr>
         <p:blipFill>
-          <a:blip xmlns:r="http://schemas.openxmlformats.org/officeDocument/2006/relationships" xmlns:a="http://schemas.openxmlformats.org/drawingml/2006/main" r:embed="R52769c87fd574654"/>
+          <a:blip xmlns:r="http://schemas.openxmlformats.org/officeDocument/2006/relationships" xmlns:a="http://schemas.openxmlformats.org/drawingml/2006/main" r:embed="Rcdbd34bc52724f88"/>
           <a:stretch xmlns:a="http://schemas.openxmlformats.org/drawingml/2006/main">
             <a:fillRect l="0" t="0" r="0" b="0"/>
           </a:stretch>
@@ -12717,7 +12641,7 @@
           <p:nvPr/>
         </p:nvPicPr>
         <p:blipFill>
-          <a:blip xmlns:r="http://schemas.openxmlformats.org/officeDocument/2006/relationships" xmlns:a="http://schemas.openxmlformats.org/drawingml/2006/main" r:embed="Rc20acf231303457f"/>
+          <a:blip xmlns:r="http://schemas.openxmlformats.org/officeDocument/2006/relationships" xmlns:a="http://schemas.openxmlformats.org/drawingml/2006/main" r:embed="R783d708080114c57"/>
           <a:stretch xmlns:a="http://schemas.openxmlformats.org/drawingml/2006/main">
             <a:fillRect l="0" t="0" r="0" b="0"/>
           </a:stretch>
@@ -14734,7 +14658,7 @@
           <p:nvPr/>
         </p:nvPicPr>
         <p:blipFill>
-          <a:blip xmlns:r="http://schemas.openxmlformats.org/officeDocument/2006/relationships" xmlns:a="http://schemas.openxmlformats.org/drawingml/2006/main" r:embed="Rb070935791694183"/>
+          <a:blip xmlns:r="http://schemas.openxmlformats.org/officeDocument/2006/relationships" xmlns:a="http://schemas.openxmlformats.org/drawingml/2006/main" r:embed="R7925ec0f0fa446da"/>
           <a:stretch xmlns:a="http://schemas.openxmlformats.org/drawingml/2006/main">
             <a:fillRect l="0" t="0" r="0" b="0"/>
           </a:stretch>
@@ -15961,7 +15885,7 @@
           <p:nvPr/>
         </p:nvPicPr>
         <p:blipFill>
-          <a:blip xmlns:r="http://schemas.openxmlformats.org/officeDocument/2006/relationships" xmlns:a="http://schemas.openxmlformats.org/drawingml/2006/main" r:embed="R86f3b884b9524809"/>
+          <a:blip xmlns:r="http://schemas.openxmlformats.org/officeDocument/2006/relationships" xmlns:a="http://schemas.openxmlformats.org/drawingml/2006/main" r:embed="R49a90b80e4da464b"/>
           <a:stretch xmlns:a="http://schemas.openxmlformats.org/drawingml/2006/main">
             <a:fillRect l="0" t="0" r="0" b="0"/>
           </a:stretch>
@@ -17102,7 +17026,7 @@
           <p:nvPr/>
         </p:nvPicPr>
         <p:blipFill>
-          <a:blip xmlns:r="http://schemas.openxmlformats.org/officeDocument/2006/relationships" xmlns:a="http://schemas.openxmlformats.org/drawingml/2006/main" r:embed="Rd3cc4a919de444b6"/>
+          <a:blip xmlns:r="http://schemas.openxmlformats.org/officeDocument/2006/relationships" xmlns:a="http://schemas.openxmlformats.org/drawingml/2006/main" r:embed="R1d656b3f922f4a3f"/>
           <a:stretch xmlns:a="http://schemas.openxmlformats.org/drawingml/2006/main">
             <a:fillRect l="0" t="0" r="0" b="0"/>
           </a:stretch>
@@ -18567,7 +18491,7 @@
           <p:nvPr/>
         </p:nvPicPr>
         <p:blipFill>
-          <a:blip xmlns:r="http://schemas.openxmlformats.org/officeDocument/2006/relationships" xmlns:a="http://schemas.openxmlformats.org/drawingml/2006/main" r:embed="Rbec317fbc9b9445d"/>
+          <a:blip xmlns:r="http://schemas.openxmlformats.org/officeDocument/2006/relationships" xmlns:a="http://schemas.openxmlformats.org/drawingml/2006/main" r:embed="R2832395b81904d30"/>
           <a:stretch xmlns:a="http://schemas.openxmlformats.org/drawingml/2006/main">
             <a:fillRect l="0" t="0" r="0" b="0"/>
           </a:stretch>
@@ -18713,7 +18637,7 @@
           <p:nvPr/>
         </p:nvPicPr>
         <p:blipFill>
-          <a:blip xmlns:r="http://schemas.openxmlformats.org/officeDocument/2006/relationships" xmlns:a="http://schemas.openxmlformats.org/drawingml/2006/main" r:embed="R493f275ededa45d6"/>
+          <a:blip xmlns:r="http://schemas.openxmlformats.org/officeDocument/2006/relationships" xmlns:a="http://schemas.openxmlformats.org/drawingml/2006/main" r:embed="R0b84a904d819411e"/>
           <a:stretch xmlns:a="http://schemas.openxmlformats.org/drawingml/2006/main">
             <a:fillRect l="0" t="0" r="0" b="0"/>
           </a:stretch>
@@ -18817,7 +18741,7 @@
                 <a:ea typeface="Aptos Display"/>
                 <a:cs typeface="Aptos Display"/>
               </a:rPr>
-              <a:t>Dari data menuju</a:t>
+              <a:t>AI mempercepat proses,</a:t>
             </a:r>
           </a:p>
           <a:p xmlns:a="http://schemas.openxmlformats.org/drawingml/2006/main">
@@ -18833,7 +18757,7 @@
                 <a:ea typeface="Aptos Display"/>
                 <a:cs typeface="Aptos Display"/>
               </a:rPr>
-              <a:t>keputusan yang dapat diuji</a:t>
+              <a:t>penalaran tetap memimpin</a:t>
             </a:r>
           </a:p>
         </p:txBody>
@@ -18900,7 +18824,7 @@
         </p:spPr>
         <p:txBody>
           <a:bodyPr xmlns:a="http://schemas.openxmlformats.org/drawingml/2006/main" wrap="square" lIns="635" tIns="635" rIns="635" bIns="635" anchor="t">
-            <a:normAutofit fontScale="100000"/>
+            <a:normAutofit fontScale="93620"/>
           </a:bodyPr>
           <a:lstStyle xmlns:a="http://schemas.openxmlformats.org/drawingml/2006/main"/>
           <a:p xmlns:a="http://schemas.openxmlformats.org/drawingml/2006/main">
@@ -18916,7 +18840,7 @@
                 <a:ea typeface="Aptos"/>
                 <a:cs typeface="Aptos"/>
               </a:rPr>
-              <a:t>Desain Eksperimen menghubungkan teori, data, metode, validasi, dan komunikasi untuk menghasilkan keputusan yang sahih, dapat direplikasi, dan bertanggung jawab.</a:t>
+              <a:t>Desain Eksperimen memadukan teori, data, komputasi, validasi, dan komunikasi. AI mempercepat eksplorasi dan pemeriksaan awal; mahasiswa tetap memverifikasi asumsi, kode, hasil numerik, ketidakpastian, sumber, dan dampak sebelum mengambil keputusan.</a:t>
             </a:r>
           </a:p>
         </p:txBody>
@@ -19086,7 +19010,7 @@
           <p:nvPr/>
         </p:nvPicPr>
         <p:blipFill>
-          <a:blip xmlns:r="http://schemas.openxmlformats.org/officeDocument/2006/relationships" xmlns:a="http://schemas.openxmlformats.org/drawingml/2006/main" r:embed="R6f9a2e2eee5d4f4a"/>
+          <a:blip xmlns:r="http://schemas.openxmlformats.org/officeDocument/2006/relationships" xmlns:a="http://schemas.openxmlformats.org/drawingml/2006/main" r:embed="R14f69c8b87684969"/>
           <a:stretch xmlns:a="http://schemas.openxmlformats.org/drawingml/2006/main">
             <a:fillRect l="0" t="0" r="0" b="0"/>
           </a:stretch>
@@ -20217,7 +20141,7 @@
           <p:nvPr/>
         </p:nvPicPr>
         <p:blipFill>
-          <a:blip xmlns:r="http://schemas.openxmlformats.org/officeDocument/2006/relationships" xmlns:a="http://schemas.openxmlformats.org/drawingml/2006/main" r:embed="Rda0b340d0c95407b"/>
+          <a:blip xmlns:r="http://schemas.openxmlformats.org/officeDocument/2006/relationships" xmlns:a="http://schemas.openxmlformats.org/drawingml/2006/main" r:embed="R48452794a609460a"/>
           <a:stretch xmlns:a="http://schemas.openxmlformats.org/drawingml/2006/main">
             <a:fillRect l="0" t="0" r="0" b="0"/>
           </a:stretch>
@@ -22321,7 +22245,7 @@
           <p:nvPr/>
         </p:nvPicPr>
         <p:blipFill>
-          <a:blip xmlns:r="http://schemas.openxmlformats.org/officeDocument/2006/relationships" xmlns:a="http://schemas.openxmlformats.org/drawingml/2006/main" r:embed="R9d509791fc574ddf"/>
+          <a:blip xmlns:r="http://schemas.openxmlformats.org/officeDocument/2006/relationships" xmlns:a="http://schemas.openxmlformats.org/drawingml/2006/main" r:embed="Ree6542f24e4f43eb"/>
           <a:stretch xmlns:a="http://schemas.openxmlformats.org/drawingml/2006/main">
             <a:fillRect l="0" t="0" r="0" b="0"/>
           </a:stretch>
@@ -23603,7 +23527,7 @@
           <p:nvPr/>
         </p:nvPicPr>
         <p:blipFill>
-          <a:blip xmlns:r="http://schemas.openxmlformats.org/officeDocument/2006/relationships" xmlns:a="http://schemas.openxmlformats.org/drawingml/2006/main" r:embed="Rd4721a73ebb446f2"/>
+          <a:blip xmlns:r="http://schemas.openxmlformats.org/officeDocument/2006/relationships" xmlns:a="http://schemas.openxmlformats.org/drawingml/2006/main" r:embed="R276c7896297b4453"/>
           <a:stretch xmlns:a="http://schemas.openxmlformats.org/drawingml/2006/main">
             <a:fillRect l="0" t="0" r="0" b="0"/>
           </a:stretch>
@@ -23882,7 +23806,7 @@
           <p:nvPr/>
         </p:nvPicPr>
         <p:blipFill>
-          <a:blip xmlns:r="http://schemas.openxmlformats.org/officeDocument/2006/relationships" xmlns:a="http://schemas.openxmlformats.org/drawingml/2006/main" r:embed="Ra4d0ed5bc9824ba6"/>
+          <a:blip xmlns:r="http://schemas.openxmlformats.org/officeDocument/2006/relationships" xmlns:a="http://schemas.openxmlformats.org/drawingml/2006/main" r:embed="Rca407e7bb304477b"/>
           <a:stretch xmlns:a="http://schemas.openxmlformats.org/drawingml/2006/main">
             <a:fillRect l="0" t="0" r="0" b="0"/>
           </a:stretch>
@@ -25962,7 +25886,7 @@
           <p:nvPr/>
         </p:nvPicPr>
         <p:blipFill>
-          <a:blip xmlns:r="http://schemas.openxmlformats.org/officeDocument/2006/relationships" xmlns:a="http://schemas.openxmlformats.org/drawingml/2006/main" r:embed="Rb8b688e526cc4f79"/>
+          <a:blip xmlns:r="http://schemas.openxmlformats.org/officeDocument/2006/relationships" xmlns:a="http://schemas.openxmlformats.org/drawingml/2006/main" r:embed="R12a90922c6f54f9b"/>
           <a:stretch xmlns:a="http://schemas.openxmlformats.org/drawingml/2006/main">
             <a:fillRect l="0" t="0" r="0" b="0"/>
           </a:stretch>
@@ -27375,7 +27299,7 @@
           <p:nvPr/>
         </p:nvPicPr>
         <p:blipFill>
-          <a:blip xmlns:r="http://schemas.openxmlformats.org/officeDocument/2006/relationships" xmlns:a="http://schemas.openxmlformats.org/drawingml/2006/main" r:embed="Rc0baeee444fe4d64"/>
+          <a:blip xmlns:r="http://schemas.openxmlformats.org/officeDocument/2006/relationships" xmlns:a="http://schemas.openxmlformats.org/drawingml/2006/main" r:embed="R24bb1c6cbcf54b66"/>
           <a:stretch xmlns:a="http://schemas.openxmlformats.org/drawingml/2006/main">
             <a:fillRect l="0" t="0" r="0" b="0"/>
           </a:stretch>
